--- a/docs/presentations/why-clawc.pptx
+++ b/docs/presentations/why-clawc.pptx
@@ -33,9 +33,14 @@
     <p:sldId id="281" r:id="rId27"/>
     <p:sldId id="282" r:id="rId28"/>
     <p:sldId id="283" r:id="rId29"/>
+    <p:sldId id="284" r:id="rId30"/>
+    <p:sldId id="285" r:id="rId31"/>
+    <p:sldId id="286" r:id="rId32"/>
+    <p:sldId id="287" r:id="rId33"/>
+    <p:sldId id="288" r:id="rId34"/>
   </p:sldIdLst>
   <p:notesMasterIdLst>
-    <p:notesMasterId r:id="rId30"/>
+    <p:notesMasterId r:id="rId35"/>
   </p:notesMasterIdLst>
   <p:sldSz cx="12192000" cy="6858000"/>
   <p:notesSz cx="6858000" cy="12192000"/>
@@ -2331,7 +2336,7 @@
 </p:notes>
 </file>
 
-<file path=ppt/notesSlides/notesSlide3.xml><?xml version="1.0" encoding="utf-8"?>
+<file path=ppt/notesSlides/notesSlide29.xml><?xml version="1.0" encoding="utf-8"?>
 <p:notes xmlns:a="http://schemas.openxmlformats.org/drawingml/2006/main" xmlns:r="http://schemas.openxmlformats.org/officeDocument/2006/relationships" xmlns:p="http://schemas.openxmlformats.org/presentationml/2006/main">
   <p:cSld>
     <p:spTree>
@@ -2400,7 +2405,447 @@
           <a:p>
             <a:fld id="{F7021451-1387-4CA6-816F-3879F97B5CBC}" type="slidenum">
               <a:rPr lang="en-US"/>
+              <a:t>29</a:t>
+            </a:fld>
+            <a:endParaRPr lang="en-US"/>
+          </a:p>
+        </p:txBody>
+      </p:sp>
+    </p:spTree>
+    <p:extLst>
+      <p:ext uri="{BB962C8B-B14F-4D97-AF65-F5344CB8AC3E}">
+        <p14:creationId xmlns:p14="http://schemas.microsoft.com/office/powerpoint/2010/main" val="1024086991"/>
+      </p:ext>
+    </p:extLst>
+  </p:cSld>
+  <p:clrMapOvr>
+    <a:masterClrMapping/>
+  </p:clrMapOvr>
+</p:notes>
+</file>
+
+<file path=ppt/notesSlides/notesSlide3.xml><?xml version="1.0" encoding="utf-8"?>
+<p:notes xmlns:a="http://schemas.openxmlformats.org/drawingml/2006/main" xmlns:r="http://schemas.openxmlformats.org/officeDocument/2006/relationships" xmlns:p="http://schemas.openxmlformats.org/presentationml/2006/main">
+  <p:cSld>
+    <p:spTree>
+      <p:nvGrpSpPr>
+        <p:cNvPr id="1" name=""/>
+        <p:cNvGrpSpPr/>
+        <p:nvPr/>
+      </p:nvGrpSpPr>
+      <p:grpSpPr>
+        <a:xfrm>
+          <a:off x="0" y="0"/>
+          <a:ext cx="0" cy="0"/>
+          <a:chOff x="0" y="0"/>
+          <a:chExt cx="0" cy="0"/>
+        </a:xfrm>
+      </p:grpSpPr>
+      <p:sp>
+        <p:nvSpPr>
+          <p:cNvPr id="2" name="Slide Image Placeholder 1"/>
+          <p:cNvSpPr>
+            <a:spLocks noGrp="1" noRot="1" noChangeAspect="1"/>
+          </p:cNvSpPr>
+          <p:nvPr>
+            <p:ph type="sldImg"/>
+          </p:nvPr>
+        </p:nvSpPr>
+        <p:spPr/>
+      </p:sp>
+      <p:sp>
+        <p:nvSpPr>
+          <p:cNvPr id="3" name="Notes Placeholder 2"/>
+          <p:cNvSpPr>
+            <a:spLocks noGrp="1"/>
+          </p:cNvSpPr>
+          <p:nvPr>
+            <p:ph type="body" idx="1"/>
+          </p:nvPr>
+        </p:nvSpPr>
+        <p:spPr/>
+        <p:txBody>
+          <a:bodyPr/>
+          <a:lstStyle/>
+          <a:p>
+            <a:r>
+              <a:rPr lang="en-US" dirty="0"/>
+              <a:t/>
+            </a:r>
+            <a:endParaRPr lang="en-US" dirty="0"/>
+          </a:p>
+        </p:txBody>
+      </p:sp>
+      <p:sp>
+        <p:nvSpPr>
+          <p:cNvPr id="4" name="Slide Number Placeholder 3"/>
+          <p:cNvSpPr>
+            <a:spLocks noGrp="1"/>
+          </p:cNvSpPr>
+          <p:nvPr>
+            <p:ph type="sldNum" sz="quarter" idx="10"/>
+          </p:nvPr>
+        </p:nvSpPr>
+        <p:spPr/>
+        <p:txBody>
+          <a:bodyPr/>
+          <a:lstStyle/>
+          <a:p>
+            <a:fld id="{F7021451-1387-4CA6-816F-3879F97B5CBC}" type="slidenum">
+              <a:rPr lang="en-US"/>
               <a:t>3</a:t>
+            </a:fld>
+            <a:endParaRPr lang="en-US"/>
+          </a:p>
+        </p:txBody>
+      </p:sp>
+    </p:spTree>
+    <p:extLst>
+      <p:ext uri="{BB962C8B-B14F-4D97-AF65-F5344CB8AC3E}">
+        <p14:creationId xmlns:p14="http://schemas.microsoft.com/office/powerpoint/2010/main" val="1024086991"/>
+      </p:ext>
+    </p:extLst>
+  </p:cSld>
+  <p:clrMapOvr>
+    <a:masterClrMapping/>
+  </p:clrMapOvr>
+</p:notes>
+</file>
+
+<file path=ppt/notesSlides/notesSlide30.xml><?xml version="1.0" encoding="utf-8"?>
+<p:notes xmlns:a="http://schemas.openxmlformats.org/drawingml/2006/main" xmlns:r="http://schemas.openxmlformats.org/officeDocument/2006/relationships" xmlns:p="http://schemas.openxmlformats.org/presentationml/2006/main">
+  <p:cSld>
+    <p:spTree>
+      <p:nvGrpSpPr>
+        <p:cNvPr id="1" name=""/>
+        <p:cNvGrpSpPr/>
+        <p:nvPr/>
+      </p:nvGrpSpPr>
+      <p:grpSpPr>
+        <a:xfrm>
+          <a:off x="0" y="0"/>
+          <a:ext cx="0" cy="0"/>
+          <a:chOff x="0" y="0"/>
+          <a:chExt cx="0" cy="0"/>
+        </a:xfrm>
+      </p:grpSpPr>
+      <p:sp>
+        <p:nvSpPr>
+          <p:cNvPr id="2" name="Slide Image Placeholder 1"/>
+          <p:cNvSpPr>
+            <a:spLocks noGrp="1" noRot="1" noChangeAspect="1"/>
+          </p:cNvSpPr>
+          <p:nvPr>
+            <p:ph type="sldImg"/>
+          </p:nvPr>
+        </p:nvSpPr>
+        <p:spPr/>
+      </p:sp>
+      <p:sp>
+        <p:nvSpPr>
+          <p:cNvPr id="3" name="Notes Placeholder 2"/>
+          <p:cNvSpPr>
+            <a:spLocks noGrp="1"/>
+          </p:cNvSpPr>
+          <p:nvPr>
+            <p:ph type="body" idx="1"/>
+          </p:nvPr>
+        </p:nvSpPr>
+        <p:spPr/>
+        <p:txBody>
+          <a:bodyPr/>
+          <a:lstStyle/>
+          <a:p>
+            <a:r>
+              <a:rPr lang="en-US" dirty="0"/>
+              <a:t/>
+            </a:r>
+            <a:endParaRPr lang="en-US" dirty="0"/>
+          </a:p>
+        </p:txBody>
+      </p:sp>
+      <p:sp>
+        <p:nvSpPr>
+          <p:cNvPr id="4" name="Slide Number Placeholder 3"/>
+          <p:cNvSpPr>
+            <a:spLocks noGrp="1"/>
+          </p:cNvSpPr>
+          <p:nvPr>
+            <p:ph type="sldNum" sz="quarter" idx="10"/>
+          </p:nvPr>
+        </p:nvSpPr>
+        <p:spPr/>
+        <p:txBody>
+          <a:bodyPr/>
+          <a:lstStyle/>
+          <a:p>
+            <a:fld id="{F7021451-1387-4CA6-816F-3879F97B5CBC}" type="slidenum">
+              <a:rPr lang="en-US"/>
+              <a:t>30</a:t>
+            </a:fld>
+            <a:endParaRPr lang="en-US"/>
+          </a:p>
+        </p:txBody>
+      </p:sp>
+    </p:spTree>
+    <p:extLst>
+      <p:ext uri="{BB962C8B-B14F-4D97-AF65-F5344CB8AC3E}">
+        <p14:creationId xmlns:p14="http://schemas.microsoft.com/office/powerpoint/2010/main" val="1024086991"/>
+      </p:ext>
+    </p:extLst>
+  </p:cSld>
+  <p:clrMapOvr>
+    <a:masterClrMapping/>
+  </p:clrMapOvr>
+</p:notes>
+</file>
+
+<file path=ppt/notesSlides/notesSlide31.xml><?xml version="1.0" encoding="utf-8"?>
+<p:notes xmlns:a="http://schemas.openxmlformats.org/drawingml/2006/main" xmlns:r="http://schemas.openxmlformats.org/officeDocument/2006/relationships" xmlns:p="http://schemas.openxmlformats.org/presentationml/2006/main">
+  <p:cSld>
+    <p:spTree>
+      <p:nvGrpSpPr>
+        <p:cNvPr id="1" name=""/>
+        <p:cNvGrpSpPr/>
+        <p:nvPr/>
+      </p:nvGrpSpPr>
+      <p:grpSpPr>
+        <a:xfrm>
+          <a:off x="0" y="0"/>
+          <a:ext cx="0" cy="0"/>
+          <a:chOff x="0" y="0"/>
+          <a:chExt cx="0" cy="0"/>
+        </a:xfrm>
+      </p:grpSpPr>
+      <p:sp>
+        <p:nvSpPr>
+          <p:cNvPr id="2" name="Slide Image Placeholder 1"/>
+          <p:cNvSpPr>
+            <a:spLocks noGrp="1" noRot="1" noChangeAspect="1"/>
+          </p:cNvSpPr>
+          <p:nvPr>
+            <p:ph type="sldImg"/>
+          </p:nvPr>
+        </p:nvSpPr>
+        <p:spPr/>
+      </p:sp>
+      <p:sp>
+        <p:nvSpPr>
+          <p:cNvPr id="3" name="Notes Placeholder 2"/>
+          <p:cNvSpPr>
+            <a:spLocks noGrp="1"/>
+          </p:cNvSpPr>
+          <p:nvPr>
+            <p:ph type="body" idx="1"/>
+          </p:nvPr>
+        </p:nvSpPr>
+        <p:spPr/>
+        <p:txBody>
+          <a:bodyPr/>
+          <a:lstStyle/>
+          <a:p>
+            <a:r>
+              <a:rPr lang="en-US" dirty="0"/>
+              <a:t/>
+            </a:r>
+            <a:endParaRPr lang="en-US" dirty="0"/>
+          </a:p>
+        </p:txBody>
+      </p:sp>
+      <p:sp>
+        <p:nvSpPr>
+          <p:cNvPr id="4" name="Slide Number Placeholder 3"/>
+          <p:cNvSpPr>
+            <a:spLocks noGrp="1"/>
+          </p:cNvSpPr>
+          <p:nvPr>
+            <p:ph type="sldNum" sz="quarter" idx="10"/>
+          </p:nvPr>
+        </p:nvSpPr>
+        <p:spPr/>
+        <p:txBody>
+          <a:bodyPr/>
+          <a:lstStyle/>
+          <a:p>
+            <a:fld id="{F7021451-1387-4CA6-816F-3879F97B5CBC}" type="slidenum">
+              <a:rPr lang="en-US"/>
+              <a:t>31</a:t>
+            </a:fld>
+            <a:endParaRPr lang="en-US"/>
+          </a:p>
+        </p:txBody>
+      </p:sp>
+    </p:spTree>
+    <p:extLst>
+      <p:ext uri="{BB962C8B-B14F-4D97-AF65-F5344CB8AC3E}">
+        <p14:creationId xmlns:p14="http://schemas.microsoft.com/office/powerpoint/2010/main" val="1024086991"/>
+      </p:ext>
+    </p:extLst>
+  </p:cSld>
+  <p:clrMapOvr>
+    <a:masterClrMapping/>
+  </p:clrMapOvr>
+</p:notes>
+</file>
+
+<file path=ppt/notesSlides/notesSlide32.xml><?xml version="1.0" encoding="utf-8"?>
+<p:notes xmlns:a="http://schemas.openxmlformats.org/drawingml/2006/main" xmlns:r="http://schemas.openxmlformats.org/officeDocument/2006/relationships" xmlns:p="http://schemas.openxmlformats.org/presentationml/2006/main">
+  <p:cSld>
+    <p:spTree>
+      <p:nvGrpSpPr>
+        <p:cNvPr id="1" name=""/>
+        <p:cNvGrpSpPr/>
+        <p:nvPr/>
+      </p:nvGrpSpPr>
+      <p:grpSpPr>
+        <a:xfrm>
+          <a:off x="0" y="0"/>
+          <a:ext cx="0" cy="0"/>
+          <a:chOff x="0" y="0"/>
+          <a:chExt cx="0" cy="0"/>
+        </a:xfrm>
+      </p:grpSpPr>
+      <p:sp>
+        <p:nvSpPr>
+          <p:cNvPr id="2" name="Slide Image Placeholder 1"/>
+          <p:cNvSpPr>
+            <a:spLocks noGrp="1" noRot="1" noChangeAspect="1"/>
+          </p:cNvSpPr>
+          <p:nvPr>
+            <p:ph type="sldImg"/>
+          </p:nvPr>
+        </p:nvSpPr>
+        <p:spPr/>
+      </p:sp>
+      <p:sp>
+        <p:nvSpPr>
+          <p:cNvPr id="3" name="Notes Placeholder 2"/>
+          <p:cNvSpPr>
+            <a:spLocks noGrp="1"/>
+          </p:cNvSpPr>
+          <p:nvPr>
+            <p:ph type="body" idx="1"/>
+          </p:nvPr>
+        </p:nvSpPr>
+        <p:spPr/>
+        <p:txBody>
+          <a:bodyPr/>
+          <a:lstStyle/>
+          <a:p>
+            <a:r>
+              <a:rPr lang="en-US" dirty="0"/>
+              <a:t/>
+            </a:r>
+            <a:endParaRPr lang="en-US" dirty="0"/>
+          </a:p>
+        </p:txBody>
+      </p:sp>
+      <p:sp>
+        <p:nvSpPr>
+          <p:cNvPr id="4" name="Slide Number Placeholder 3"/>
+          <p:cNvSpPr>
+            <a:spLocks noGrp="1"/>
+          </p:cNvSpPr>
+          <p:nvPr>
+            <p:ph type="sldNum" sz="quarter" idx="10"/>
+          </p:nvPr>
+        </p:nvSpPr>
+        <p:spPr/>
+        <p:txBody>
+          <a:bodyPr/>
+          <a:lstStyle/>
+          <a:p>
+            <a:fld id="{F7021451-1387-4CA6-816F-3879F97B5CBC}" type="slidenum">
+              <a:rPr lang="en-US"/>
+              <a:t>32</a:t>
+            </a:fld>
+            <a:endParaRPr lang="en-US"/>
+          </a:p>
+        </p:txBody>
+      </p:sp>
+    </p:spTree>
+    <p:extLst>
+      <p:ext uri="{BB962C8B-B14F-4D97-AF65-F5344CB8AC3E}">
+        <p14:creationId xmlns:p14="http://schemas.microsoft.com/office/powerpoint/2010/main" val="1024086991"/>
+      </p:ext>
+    </p:extLst>
+  </p:cSld>
+  <p:clrMapOvr>
+    <a:masterClrMapping/>
+  </p:clrMapOvr>
+</p:notes>
+</file>
+
+<file path=ppt/notesSlides/notesSlide33.xml><?xml version="1.0" encoding="utf-8"?>
+<p:notes xmlns:a="http://schemas.openxmlformats.org/drawingml/2006/main" xmlns:r="http://schemas.openxmlformats.org/officeDocument/2006/relationships" xmlns:p="http://schemas.openxmlformats.org/presentationml/2006/main">
+  <p:cSld>
+    <p:spTree>
+      <p:nvGrpSpPr>
+        <p:cNvPr id="1" name=""/>
+        <p:cNvGrpSpPr/>
+        <p:nvPr/>
+      </p:nvGrpSpPr>
+      <p:grpSpPr>
+        <a:xfrm>
+          <a:off x="0" y="0"/>
+          <a:ext cx="0" cy="0"/>
+          <a:chOff x="0" y="0"/>
+          <a:chExt cx="0" cy="0"/>
+        </a:xfrm>
+      </p:grpSpPr>
+      <p:sp>
+        <p:nvSpPr>
+          <p:cNvPr id="2" name="Slide Image Placeholder 1"/>
+          <p:cNvSpPr>
+            <a:spLocks noGrp="1" noRot="1" noChangeAspect="1"/>
+          </p:cNvSpPr>
+          <p:nvPr>
+            <p:ph type="sldImg"/>
+          </p:nvPr>
+        </p:nvSpPr>
+        <p:spPr/>
+      </p:sp>
+      <p:sp>
+        <p:nvSpPr>
+          <p:cNvPr id="3" name="Notes Placeholder 2"/>
+          <p:cNvSpPr>
+            <a:spLocks noGrp="1"/>
+          </p:cNvSpPr>
+          <p:nvPr>
+            <p:ph type="body" idx="1"/>
+          </p:nvPr>
+        </p:nvSpPr>
+        <p:spPr/>
+        <p:txBody>
+          <a:bodyPr/>
+          <a:lstStyle/>
+          <a:p>
+            <a:r>
+              <a:rPr lang="en-US" dirty="0"/>
+              <a:t/>
+            </a:r>
+            <a:endParaRPr lang="en-US" dirty="0"/>
+          </a:p>
+        </p:txBody>
+      </p:sp>
+      <p:sp>
+        <p:nvSpPr>
+          <p:cNvPr id="4" name="Slide Number Placeholder 3"/>
+          <p:cNvSpPr>
+            <a:spLocks noGrp="1"/>
+          </p:cNvSpPr>
+          <p:nvPr>
+            <p:ph type="sldNum" sz="quarter" idx="10"/>
+          </p:nvPr>
+        </p:nvSpPr>
+        <p:spPr/>
+        <p:txBody>
+          <a:bodyPr/>
+          <a:lstStyle/>
+          <a:p>
+            <a:fld id="{F7021451-1387-4CA6-816F-3879F97B5CBC}" type="slidenum">
+              <a:rPr lang="en-US"/>
+              <a:t>33</a:t>
             </a:fld>
             <a:endParaRPr lang="en-US"/>
           </a:p>
@@ -4073,9 +4518,204 @@
 </p:sld>
 </file>
 
+<file path=ppt/slides/slide29.xml><?xml version="1.0" encoding="utf-8"?>
+<p:sld xmlns:a="http://schemas.openxmlformats.org/drawingml/2006/main" xmlns:r="http://schemas.openxmlformats.org/officeDocument/2006/relationships" xmlns:p="http://schemas.openxmlformats.org/presentationml/2006/main">
+  <p:cSld name="Slide 29">
+    <p:bg>
+      <p:bgPr>
+        <a:blipFill dpi="0" rotWithShape="1">
+          <a:blip r:embed="rId1">
+            <a:lum/>
+          </a:blip>
+          <a:srcRect/>
+          <a:stretch>
+            <a:fillRect/>
+          </a:stretch>
+        </a:blipFill>
+        <a:effectLst/>
+      </p:bgPr>
+    </p:bg>
+    <p:spTree>
+      <p:nvGrpSpPr>
+        <p:cNvPr id="1" name=""/>
+        <p:cNvGrpSpPr/>
+        <p:nvPr/>
+      </p:nvGrpSpPr>
+      <p:grpSpPr>
+        <a:xfrm>
+          <a:off x="0" y="0"/>
+          <a:ext cx="0" cy="0"/>
+          <a:chOff x="0" y="0"/>
+          <a:chExt cx="0" cy="0"/>
+        </a:xfrm>
+      </p:grpSpPr>
+    </p:spTree>
+  </p:cSld>
+  <p:clrMapOvr>
+    <a:masterClrMapping/>
+  </p:clrMapOvr>
+</p:sld>
+</file>
+
 <file path=ppt/slides/slide3.xml><?xml version="1.0" encoding="utf-8"?>
 <p:sld xmlns:a="http://schemas.openxmlformats.org/drawingml/2006/main" xmlns:r="http://schemas.openxmlformats.org/officeDocument/2006/relationships" xmlns:p="http://schemas.openxmlformats.org/presentationml/2006/main">
   <p:cSld name="Slide 3">
+    <p:bg>
+      <p:bgPr>
+        <a:blipFill dpi="0" rotWithShape="1">
+          <a:blip r:embed="rId1">
+            <a:lum/>
+          </a:blip>
+          <a:srcRect/>
+          <a:stretch>
+            <a:fillRect/>
+          </a:stretch>
+        </a:blipFill>
+        <a:effectLst/>
+      </p:bgPr>
+    </p:bg>
+    <p:spTree>
+      <p:nvGrpSpPr>
+        <p:cNvPr id="1" name=""/>
+        <p:cNvGrpSpPr/>
+        <p:nvPr/>
+      </p:nvGrpSpPr>
+      <p:grpSpPr>
+        <a:xfrm>
+          <a:off x="0" y="0"/>
+          <a:ext cx="0" cy="0"/>
+          <a:chOff x="0" y="0"/>
+          <a:chExt cx="0" cy="0"/>
+        </a:xfrm>
+      </p:grpSpPr>
+    </p:spTree>
+  </p:cSld>
+  <p:clrMapOvr>
+    <a:masterClrMapping/>
+  </p:clrMapOvr>
+</p:sld>
+</file>
+
+<file path=ppt/slides/slide30.xml><?xml version="1.0" encoding="utf-8"?>
+<p:sld xmlns:a="http://schemas.openxmlformats.org/drawingml/2006/main" xmlns:r="http://schemas.openxmlformats.org/officeDocument/2006/relationships" xmlns:p="http://schemas.openxmlformats.org/presentationml/2006/main">
+  <p:cSld name="Slide 30">
+    <p:bg>
+      <p:bgPr>
+        <a:blipFill dpi="0" rotWithShape="1">
+          <a:blip r:embed="rId1">
+            <a:lum/>
+          </a:blip>
+          <a:srcRect/>
+          <a:stretch>
+            <a:fillRect/>
+          </a:stretch>
+        </a:blipFill>
+        <a:effectLst/>
+      </p:bgPr>
+    </p:bg>
+    <p:spTree>
+      <p:nvGrpSpPr>
+        <p:cNvPr id="1" name=""/>
+        <p:cNvGrpSpPr/>
+        <p:nvPr/>
+      </p:nvGrpSpPr>
+      <p:grpSpPr>
+        <a:xfrm>
+          <a:off x="0" y="0"/>
+          <a:ext cx="0" cy="0"/>
+          <a:chOff x="0" y="0"/>
+          <a:chExt cx="0" cy="0"/>
+        </a:xfrm>
+      </p:grpSpPr>
+    </p:spTree>
+  </p:cSld>
+  <p:clrMapOvr>
+    <a:masterClrMapping/>
+  </p:clrMapOvr>
+</p:sld>
+</file>
+
+<file path=ppt/slides/slide31.xml><?xml version="1.0" encoding="utf-8"?>
+<p:sld xmlns:a="http://schemas.openxmlformats.org/drawingml/2006/main" xmlns:r="http://schemas.openxmlformats.org/officeDocument/2006/relationships" xmlns:p="http://schemas.openxmlformats.org/presentationml/2006/main">
+  <p:cSld name="Slide 31">
+    <p:bg>
+      <p:bgPr>
+        <a:blipFill dpi="0" rotWithShape="1">
+          <a:blip r:embed="rId1">
+            <a:lum/>
+          </a:blip>
+          <a:srcRect/>
+          <a:stretch>
+            <a:fillRect/>
+          </a:stretch>
+        </a:blipFill>
+        <a:effectLst/>
+      </p:bgPr>
+    </p:bg>
+    <p:spTree>
+      <p:nvGrpSpPr>
+        <p:cNvPr id="1" name=""/>
+        <p:cNvGrpSpPr/>
+        <p:nvPr/>
+      </p:nvGrpSpPr>
+      <p:grpSpPr>
+        <a:xfrm>
+          <a:off x="0" y="0"/>
+          <a:ext cx="0" cy="0"/>
+          <a:chOff x="0" y="0"/>
+          <a:chExt cx="0" cy="0"/>
+        </a:xfrm>
+      </p:grpSpPr>
+    </p:spTree>
+  </p:cSld>
+  <p:clrMapOvr>
+    <a:masterClrMapping/>
+  </p:clrMapOvr>
+</p:sld>
+</file>
+
+<file path=ppt/slides/slide32.xml><?xml version="1.0" encoding="utf-8"?>
+<p:sld xmlns:a="http://schemas.openxmlformats.org/drawingml/2006/main" xmlns:r="http://schemas.openxmlformats.org/officeDocument/2006/relationships" xmlns:p="http://schemas.openxmlformats.org/presentationml/2006/main">
+  <p:cSld name="Slide 32">
+    <p:bg>
+      <p:bgPr>
+        <a:blipFill dpi="0" rotWithShape="1">
+          <a:blip r:embed="rId1">
+            <a:lum/>
+          </a:blip>
+          <a:srcRect/>
+          <a:stretch>
+            <a:fillRect/>
+          </a:stretch>
+        </a:blipFill>
+        <a:effectLst/>
+      </p:bgPr>
+    </p:bg>
+    <p:spTree>
+      <p:nvGrpSpPr>
+        <p:cNvPr id="1" name=""/>
+        <p:cNvGrpSpPr/>
+        <p:nvPr/>
+      </p:nvGrpSpPr>
+      <p:grpSpPr>
+        <a:xfrm>
+          <a:off x="0" y="0"/>
+          <a:ext cx="0" cy="0"/>
+          <a:chOff x="0" y="0"/>
+          <a:chExt cx="0" cy="0"/>
+        </a:xfrm>
+      </p:grpSpPr>
+    </p:spTree>
+  </p:cSld>
+  <p:clrMapOvr>
+    <a:masterClrMapping/>
+  </p:clrMapOvr>
+</p:sld>
+</file>
+
+<file path=ppt/slides/slide33.xml><?xml version="1.0" encoding="utf-8"?>
+<p:sld xmlns:a="http://schemas.openxmlformats.org/drawingml/2006/main" xmlns:r="http://schemas.openxmlformats.org/officeDocument/2006/relationships" xmlns:p="http://schemas.openxmlformats.org/presentationml/2006/main">
+  <p:cSld name="Slide 33">
     <p:bg>
       <p:bgPr>
         <a:blipFill dpi="0" rotWithShape="1">

--- a/docs/presentations/why-clawc.pptx
+++ b/docs/presentations/why-clawc.pptx
@@ -38,9 +38,12 @@
     <p:sldId id="286" r:id="rId32"/>
     <p:sldId id="287" r:id="rId33"/>
     <p:sldId id="288" r:id="rId34"/>
+    <p:sldId id="289" r:id="rId35"/>
+    <p:sldId id="290" r:id="rId36"/>
+    <p:sldId id="291" r:id="rId37"/>
   </p:sldIdLst>
   <p:notesMasterIdLst>
-    <p:notesMasterId r:id="rId35"/>
+    <p:notesMasterId r:id="rId38"/>
   </p:notesMasterIdLst>
   <p:sldSz cx="12192000" cy="6858000"/>
   <p:notesSz cx="6858000" cy="12192000"/>
@@ -798,7 +801,8 @@
           <a:p>
             <a:r>
               <a:rPr lang="en-US" dirty="0"/>
-              <a:t/>
+              <a:t>Pinch/PRESS slide commented out pending patent approval
+&lt;!-- _class: small</a:t>
             </a:r>
             <a:endParaRPr lang="en-US" dirty="0"/>
           </a:p>
@@ -2734,7 +2738,11 @@
           <a:p>
             <a:r>
               <a:rPr lang="en-US" dirty="0"/>
-              <a:t/>
+              <a:t>Navigator N-06: This slide is dense — consider splitting into two for
+     presentations: (a) "Three layers, one API" with the architecture diagram and
+     WHO USES WHAT table, (b) "Write path: validate, write, recompile, audit"
+     with the write path details. The audience absorbs architecture and write
+     semantics better as two separate concepts.</a:t>
             </a:r>
             <a:endParaRPr lang="en-US" dirty="0"/>
           </a:p>
@@ -2846,6 +2854,270 @@
             <a:fld id="{F7021451-1387-4CA6-816F-3879F97B5CBC}" type="slidenum">
               <a:rPr lang="en-US"/>
               <a:t>33</a:t>
+            </a:fld>
+            <a:endParaRPr lang="en-US"/>
+          </a:p>
+        </p:txBody>
+      </p:sp>
+    </p:spTree>
+    <p:extLst>
+      <p:ext uri="{BB962C8B-B14F-4D97-AF65-F5344CB8AC3E}">
+        <p14:creationId xmlns:p14="http://schemas.microsoft.com/office/powerpoint/2010/main" val="1024086991"/>
+      </p:ext>
+    </p:extLst>
+  </p:cSld>
+  <p:clrMapOvr>
+    <a:masterClrMapping/>
+  </p:clrMapOvr>
+</p:notes>
+</file>
+
+<file path=ppt/notesSlides/notesSlide34.xml><?xml version="1.0" encoding="utf-8"?>
+<p:notes xmlns:a="http://schemas.openxmlformats.org/drawingml/2006/main" xmlns:r="http://schemas.openxmlformats.org/officeDocument/2006/relationships" xmlns:p="http://schemas.openxmlformats.org/presentationml/2006/main">
+  <p:cSld>
+    <p:spTree>
+      <p:nvGrpSpPr>
+        <p:cNvPr id="1" name=""/>
+        <p:cNvGrpSpPr/>
+        <p:nvPr/>
+      </p:nvGrpSpPr>
+      <p:grpSpPr>
+        <a:xfrm>
+          <a:off x="0" y="0"/>
+          <a:ext cx="0" cy="0"/>
+          <a:chOff x="0" y="0"/>
+          <a:chExt cx="0" cy="0"/>
+        </a:xfrm>
+      </p:grpSpPr>
+      <p:sp>
+        <p:nvSpPr>
+          <p:cNvPr id="2" name="Slide Image Placeholder 1"/>
+          <p:cNvSpPr>
+            <a:spLocks noGrp="1" noRot="1" noChangeAspect="1"/>
+          </p:cNvSpPr>
+          <p:nvPr>
+            <p:ph type="sldImg"/>
+          </p:nvPr>
+        </p:nvSpPr>
+        <p:spPr/>
+      </p:sp>
+      <p:sp>
+        <p:nvSpPr>
+          <p:cNvPr id="3" name="Notes Placeholder 2"/>
+          <p:cNvSpPr>
+            <a:spLocks noGrp="1"/>
+          </p:cNvSpPr>
+          <p:nvPr>
+            <p:ph type="body" idx="1"/>
+          </p:nvPr>
+        </p:nvSpPr>
+        <p:spPr/>
+        <p:txBody>
+          <a:bodyPr/>
+          <a:lstStyle/>
+          <a:p>
+            <a:r>
+              <a:rPr lang="en-US" dirty="0"/>
+              <a:t/>
+            </a:r>
+            <a:endParaRPr lang="en-US" dirty="0"/>
+          </a:p>
+        </p:txBody>
+      </p:sp>
+      <p:sp>
+        <p:nvSpPr>
+          <p:cNvPr id="4" name="Slide Number Placeholder 3"/>
+          <p:cNvSpPr>
+            <a:spLocks noGrp="1"/>
+          </p:cNvSpPr>
+          <p:nvPr>
+            <p:ph type="sldNum" sz="quarter" idx="10"/>
+          </p:nvPr>
+        </p:nvSpPr>
+        <p:spPr/>
+        <p:txBody>
+          <a:bodyPr/>
+          <a:lstStyle/>
+          <a:p>
+            <a:fld id="{F7021451-1387-4CA6-816F-3879F97B5CBC}" type="slidenum">
+              <a:rPr lang="en-US"/>
+              <a:t>34</a:t>
+            </a:fld>
+            <a:endParaRPr lang="en-US"/>
+          </a:p>
+        </p:txBody>
+      </p:sp>
+    </p:spTree>
+    <p:extLst>
+      <p:ext uri="{BB962C8B-B14F-4D97-AF65-F5344CB8AC3E}">
+        <p14:creationId xmlns:p14="http://schemas.microsoft.com/office/powerpoint/2010/main" val="1024086991"/>
+      </p:ext>
+    </p:extLst>
+  </p:cSld>
+  <p:clrMapOvr>
+    <a:masterClrMapping/>
+  </p:clrMapOvr>
+</p:notes>
+</file>
+
+<file path=ppt/notesSlides/notesSlide35.xml><?xml version="1.0" encoding="utf-8"?>
+<p:notes xmlns:a="http://schemas.openxmlformats.org/drawingml/2006/main" xmlns:r="http://schemas.openxmlformats.org/officeDocument/2006/relationships" xmlns:p="http://schemas.openxmlformats.org/presentationml/2006/main">
+  <p:cSld>
+    <p:spTree>
+      <p:nvGrpSpPr>
+        <p:cNvPr id="1" name=""/>
+        <p:cNvGrpSpPr/>
+        <p:nvPr/>
+      </p:nvGrpSpPr>
+      <p:grpSpPr>
+        <a:xfrm>
+          <a:off x="0" y="0"/>
+          <a:ext cx="0" cy="0"/>
+          <a:chOff x="0" y="0"/>
+          <a:chExt cx="0" cy="0"/>
+        </a:xfrm>
+      </p:grpSpPr>
+      <p:sp>
+        <p:nvSpPr>
+          <p:cNvPr id="2" name="Slide Image Placeholder 1"/>
+          <p:cNvSpPr>
+            <a:spLocks noGrp="1" noRot="1" noChangeAspect="1"/>
+          </p:cNvSpPr>
+          <p:nvPr>
+            <p:ph type="sldImg"/>
+          </p:nvPr>
+        </p:nvSpPr>
+        <p:spPr/>
+      </p:sp>
+      <p:sp>
+        <p:nvSpPr>
+          <p:cNvPr id="3" name="Notes Placeholder 2"/>
+          <p:cNvSpPr>
+            <a:spLocks noGrp="1"/>
+          </p:cNvSpPr>
+          <p:nvPr>
+            <p:ph type="body" idx="1"/>
+          </p:nvPr>
+        </p:nvSpPr>
+        <p:spPr/>
+        <p:txBody>
+          <a:bodyPr/>
+          <a:lstStyle/>
+          <a:p>
+            <a:r>
+              <a:rPr lang="en-US" dirty="0"/>
+              <a:t/>
+            </a:r>
+            <a:endParaRPr lang="en-US" dirty="0"/>
+          </a:p>
+        </p:txBody>
+      </p:sp>
+      <p:sp>
+        <p:nvSpPr>
+          <p:cNvPr id="4" name="Slide Number Placeholder 3"/>
+          <p:cNvSpPr>
+            <a:spLocks noGrp="1"/>
+          </p:cNvSpPr>
+          <p:nvPr>
+            <p:ph type="sldNum" sz="quarter" idx="10"/>
+          </p:nvPr>
+        </p:nvSpPr>
+        <p:spPr/>
+        <p:txBody>
+          <a:bodyPr/>
+          <a:lstStyle/>
+          <a:p>
+            <a:fld id="{F7021451-1387-4CA6-816F-3879F97B5CBC}" type="slidenum">
+              <a:rPr lang="en-US"/>
+              <a:t>35</a:t>
+            </a:fld>
+            <a:endParaRPr lang="en-US"/>
+          </a:p>
+        </p:txBody>
+      </p:sp>
+    </p:spTree>
+    <p:extLst>
+      <p:ext uri="{BB962C8B-B14F-4D97-AF65-F5344CB8AC3E}">
+        <p14:creationId xmlns:p14="http://schemas.microsoft.com/office/powerpoint/2010/main" val="1024086991"/>
+      </p:ext>
+    </p:extLst>
+  </p:cSld>
+  <p:clrMapOvr>
+    <a:masterClrMapping/>
+  </p:clrMapOvr>
+</p:notes>
+</file>
+
+<file path=ppt/notesSlides/notesSlide36.xml><?xml version="1.0" encoding="utf-8"?>
+<p:notes xmlns:a="http://schemas.openxmlformats.org/drawingml/2006/main" xmlns:r="http://schemas.openxmlformats.org/officeDocument/2006/relationships" xmlns:p="http://schemas.openxmlformats.org/presentationml/2006/main">
+  <p:cSld>
+    <p:spTree>
+      <p:nvGrpSpPr>
+        <p:cNvPr id="1" name=""/>
+        <p:cNvGrpSpPr/>
+        <p:nvPr/>
+      </p:nvGrpSpPr>
+      <p:grpSpPr>
+        <a:xfrm>
+          <a:off x="0" y="0"/>
+          <a:ext cx="0" cy="0"/>
+          <a:chOff x="0" y="0"/>
+          <a:chExt cx="0" cy="0"/>
+        </a:xfrm>
+      </p:grpSpPr>
+      <p:sp>
+        <p:nvSpPr>
+          <p:cNvPr id="2" name="Slide Image Placeholder 1"/>
+          <p:cNvSpPr>
+            <a:spLocks noGrp="1" noRot="1" noChangeAspect="1"/>
+          </p:cNvSpPr>
+          <p:nvPr>
+            <p:ph type="sldImg"/>
+          </p:nvPr>
+        </p:nvSpPr>
+        <p:spPr/>
+      </p:sp>
+      <p:sp>
+        <p:nvSpPr>
+          <p:cNvPr id="3" name="Notes Placeholder 2"/>
+          <p:cNvSpPr>
+            <a:spLocks noGrp="1"/>
+          </p:cNvSpPr>
+          <p:nvPr>
+            <p:ph type="body" idx="1"/>
+          </p:nvPr>
+        </p:nvSpPr>
+        <p:spPr/>
+        <p:txBody>
+          <a:bodyPr/>
+          <a:lstStyle/>
+          <a:p>
+            <a:r>
+              <a:rPr lang="en-US" dirty="0"/>
+              <a:t/>
+            </a:r>
+            <a:endParaRPr lang="en-US" dirty="0"/>
+          </a:p>
+        </p:txBody>
+      </p:sp>
+      <p:sp>
+        <p:nvSpPr>
+          <p:cNvPr id="4" name="Slide Number Placeholder 3"/>
+          <p:cNvSpPr>
+            <a:spLocks noGrp="1"/>
+          </p:cNvSpPr>
+          <p:nvPr>
+            <p:ph type="sldNum" sz="quarter" idx="10"/>
+          </p:nvPr>
+        </p:nvSpPr>
+        <p:spPr/>
+        <p:txBody>
+          <a:bodyPr/>
+          <a:lstStyle/>
+          <a:p>
+            <a:fld id="{F7021451-1387-4CA6-816F-3879F97B5CBC}" type="slidenum">
+              <a:rPr lang="en-US"/>
+              <a:t>36</a:t>
             </a:fld>
             <a:endParaRPr lang="en-US"/>
           </a:p>
@@ -4716,6 +4988,123 @@
 <file path=ppt/slides/slide33.xml><?xml version="1.0" encoding="utf-8"?>
 <p:sld xmlns:a="http://schemas.openxmlformats.org/drawingml/2006/main" xmlns:r="http://schemas.openxmlformats.org/officeDocument/2006/relationships" xmlns:p="http://schemas.openxmlformats.org/presentationml/2006/main">
   <p:cSld name="Slide 33">
+    <p:bg>
+      <p:bgPr>
+        <a:blipFill dpi="0" rotWithShape="1">
+          <a:blip r:embed="rId1">
+            <a:lum/>
+          </a:blip>
+          <a:srcRect/>
+          <a:stretch>
+            <a:fillRect/>
+          </a:stretch>
+        </a:blipFill>
+        <a:effectLst/>
+      </p:bgPr>
+    </p:bg>
+    <p:spTree>
+      <p:nvGrpSpPr>
+        <p:cNvPr id="1" name=""/>
+        <p:cNvGrpSpPr/>
+        <p:nvPr/>
+      </p:nvGrpSpPr>
+      <p:grpSpPr>
+        <a:xfrm>
+          <a:off x="0" y="0"/>
+          <a:ext cx="0" cy="0"/>
+          <a:chOff x="0" y="0"/>
+          <a:chExt cx="0" cy="0"/>
+        </a:xfrm>
+      </p:grpSpPr>
+    </p:spTree>
+  </p:cSld>
+  <p:clrMapOvr>
+    <a:masterClrMapping/>
+  </p:clrMapOvr>
+</p:sld>
+</file>
+
+<file path=ppt/slides/slide34.xml><?xml version="1.0" encoding="utf-8"?>
+<p:sld xmlns:a="http://schemas.openxmlformats.org/drawingml/2006/main" xmlns:r="http://schemas.openxmlformats.org/officeDocument/2006/relationships" xmlns:p="http://schemas.openxmlformats.org/presentationml/2006/main">
+  <p:cSld name="Slide 34">
+    <p:bg>
+      <p:bgPr>
+        <a:blipFill dpi="0" rotWithShape="1">
+          <a:blip r:embed="rId1">
+            <a:lum/>
+          </a:blip>
+          <a:srcRect/>
+          <a:stretch>
+            <a:fillRect/>
+          </a:stretch>
+        </a:blipFill>
+        <a:effectLst/>
+      </p:bgPr>
+    </p:bg>
+    <p:spTree>
+      <p:nvGrpSpPr>
+        <p:cNvPr id="1" name=""/>
+        <p:cNvGrpSpPr/>
+        <p:nvPr/>
+      </p:nvGrpSpPr>
+      <p:grpSpPr>
+        <a:xfrm>
+          <a:off x="0" y="0"/>
+          <a:ext cx="0" cy="0"/>
+          <a:chOff x="0" y="0"/>
+          <a:chExt cx="0" cy="0"/>
+        </a:xfrm>
+      </p:grpSpPr>
+    </p:spTree>
+  </p:cSld>
+  <p:clrMapOvr>
+    <a:masterClrMapping/>
+  </p:clrMapOvr>
+</p:sld>
+</file>
+
+<file path=ppt/slides/slide35.xml><?xml version="1.0" encoding="utf-8"?>
+<p:sld xmlns:a="http://schemas.openxmlformats.org/drawingml/2006/main" xmlns:r="http://schemas.openxmlformats.org/officeDocument/2006/relationships" xmlns:p="http://schemas.openxmlformats.org/presentationml/2006/main">
+  <p:cSld name="Slide 35">
+    <p:bg>
+      <p:bgPr>
+        <a:blipFill dpi="0" rotWithShape="1">
+          <a:blip r:embed="rId1">
+            <a:lum/>
+          </a:blip>
+          <a:srcRect/>
+          <a:stretch>
+            <a:fillRect/>
+          </a:stretch>
+        </a:blipFill>
+        <a:effectLst/>
+      </p:bgPr>
+    </p:bg>
+    <p:spTree>
+      <p:nvGrpSpPr>
+        <p:cNvPr id="1" name=""/>
+        <p:cNvGrpSpPr/>
+        <p:nvPr/>
+      </p:nvGrpSpPr>
+      <p:grpSpPr>
+        <a:xfrm>
+          <a:off x="0" y="0"/>
+          <a:ext cx="0" cy="0"/>
+          <a:chOff x="0" y="0"/>
+          <a:chExt cx="0" cy="0"/>
+        </a:xfrm>
+      </p:grpSpPr>
+    </p:spTree>
+  </p:cSld>
+  <p:clrMapOvr>
+    <a:masterClrMapping/>
+  </p:clrMapOvr>
+</p:sld>
+</file>
+
+<file path=ppt/slides/slide36.xml><?xml version="1.0" encoding="utf-8"?>
+<p:sld xmlns:a="http://schemas.openxmlformats.org/drawingml/2006/main" xmlns:r="http://schemas.openxmlformats.org/officeDocument/2006/relationships" xmlns:p="http://schemas.openxmlformats.org/presentationml/2006/main">
+  <p:cSld name="Slide 36">
     <p:bg>
       <p:bgPr>
         <a:blipFill dpi="0" rotWithShape="1">
